--- a/research/publication/RBF_DECK.pptx
+++ b/research/publication/RBF_DECK.pptx
@@ -1459,7 +1459,7 @@
           <a:p>
             <a:r>
               <a:rPr lang="en-US" dirty="0"/>
-              <a:t>Opening frame: this is a study of contract mechanics, not a claim about sellers. Say the disclaimer out loud — it is the reason the rest is credible.</a:t>
+              <a:t>Opening frame: this is a study of contract mechanics, not a claim about sellers. Say the disclaimer out loud — it is the reason the rest is credible. Note the scope: simulated magnitudes, not every figure — the propositions are proved, not simulated.</a:t>
             </a:r>
             <a:endParaRPr lang="en-US" dirty="0"/>
           </a:p>
@@ -1723,7 +1723,7 @@
           <a:p>
             <a:r>
               <a:rPr lang="en-US" dirty="0"/>
-              <a:t>The corrected reproducibility claim is a better credential than the overstated one would have been.</a:t>
+              <a:t>The corrected reproducibility claim is a better credential than the overstated one would have been. If asked: the checksum table covers simulation output only — proofs are backed by DERIVATIONS.md and cited facts by the literature matrix.</a:t>
             </a:r>
             <a:endParaRPr lang="en-US" dirty="0"/>
           </a:p>
@@ -1899,7 +1899,7 @@
           <a:p>
             <a:r>
               <a:rPr lang="en-US" dirty="0"/>
-              <a:t>The whole argument in one slide. The two cards are the same fact.</a:t>
+              <a:t>The whole argument in one slide. The two cards are the same fact. If asked why 'roughly' flat: the final payment is clipped to the remaining balance, and the displayed denominator is GMV rather than net sales.</a:t>
             </a:r>
             <a:endParaRPr lang="en-US" dirty="0"/>
           </a:p>
@@ -2075,7 +2075,7 @@
           <a:p>
             <a:r>
               <a:rPr lang="en-US" dirty="0"/>
-              <a:t>Matched on the reference path means principal, total and term are equal — so the comparison isolates timing.</a:t>
+              <a:t>Two distinct ideas, do not merge them. Pairing = every arm sees the same generated path. Cost-matching = only RBF and FIX-A share principal, total and term. FIX-B is an outside price reference and is not matched to anything; its 18% is an assumption of ours.</a:t>
             </a:r>
             <a:endParaRPr lang="en-US" dirty="0"/>
           </a:p>
@@ -2997,7 +2997,7 @@
         </p:nvSpPr>
         <p:spPr>
           <a:xfrm>
-            <a:off x="822960" y="4297680"/>
+            <a:off x="822960" y="4160520"/>
             <a:ext cx="1463040" cy="41148"/>
           </a:xfrm>
           <a:prstGeom prst="rect">
@@ -3017,7 +3017,85 @@
         </p:nvSpPr>
         <p:spPr>
           <a:xfrm>
-            <a:off x="822960" y="4663440"/>
+            <a:off x="822960" y="4480560"/>
+            <a:ext cx="10515600" cy="320040"/>
+          </a:xfrm>
+          <a:prstGeom prst="rect">
+            <a:avLst/>
+          </a:prstGeom>
+          <a:noFill/>
+          <a:ln/>
+        </p:spPr>
+        <p:txBody>
+          <a:bodyPr wrap="square" lIns="0" tIns="0" rIns="0" bIns="0" rtlCol="0" anchor="ctr"/>
+          <a:lstStyle/>
+          <a:p>
+            <a:pPr indent="0" marL="0">
+              <a:buNone/>
+            </a:pPr>
+            <a:r>
+              <a:rPr lang="en-US" sz="1400" dirty="0">
+                <a:solidFill>
+                  <a:srgbClr val="E4E4E4"/>
+                </a:solidFill>
+                <a:latin typeface="Calibri" pitchFamily="34" charset="0"/>
+                <a:ea typeface="Calibri" pitchFamily="34" charset="-122"/>
+                <a:cs typeface="Calibri" pitchFamily="34" charset="-120"/>
+              </a:rPr>
+              <a:t>Le Huu Hoang  ·  Independent research  ·  August 2026</a:t>
+            </a:r>
+            <a:endParaRPr lang="en-US" sz="1400" dirty="0"/>
+          </a:p>
+        </p:txBody>
+      </p:sp>
+      <p:sp>
+        <p:nvSpPr>
+          <p:cNvPr id="6" name="Text 4"/>
+          <p:cNvSpPr/>
+          <p:nvPr/>
+        </p:nvSpPr>
+        <p:spPr>
+          <a:xfrm>
+            <a:off x="822960" y="4828032"/>
+            <a:ext cx="10515600" cy="320040"/>
+          </a:xfrm>
+          <a:prstGeom prst="rect">
+            <a:avLst/>
+          </a:prstGeom>
+          <a:noFill/>
+          <a:ln/>
+        </p:spPr>
+        <p:txBody>
+          <a:bodyPr wrap="square" lIns="0" tIns="0" rIns="0" bIns="0" rtlCol="0" anchor="ctr"/>
+          <a:lstStyle/>
+          <a:p>
+            <a:pPr indent="0" marL="0">
+              <a:buNone/>
+            </a:pPr>
+            <a:r>
+              <a:rPr lang="en-US" sz="1150" dirty="0">
+                <a:solidFill>
+                  <a:srgbClr val="9A9A9A"/>
+                </a:solidFill>
+                <a:latin typeface="Calibri" pitchFamily="34" charset="0"/>
+                <a:ea typeface="Calibri" pitchFamily="34" charset="-122"/>
+                <a:cs typeface="Calibri" pitchFamily="34" charset="-120"/>
+              </a:rPr>
+              <a:t>lehuuhoang1909@gmail.com  ·  sellerflow-production.up.railway.app  ·  github.com/hoangle0919/sellerflow</a:t>
+            </a:r>
+            <a:endParaRPr lang="en-US" sz="1150" dirty="0"/>
+          </a:p>
+        </p:txBody>
+      </p:sp>
+      <p:sp>
+        <p:nvSpPr>
+          <p:cNvPr id="7" name="Text 5"/>
+          <p:cNvSpPr/>
+          <p:nvPr/>
+        </p:nvSpPr>
+        <p:spPr>
+          <a:xfrm>
+            <a:off x="822960" y="5257800"/>
             <a:ext cx="10515600" cy="731520"/>
           </a:xfrm>
           <a:prstGeom prst="rect">
@@ -3045,7 +3123,7 @@
                 <a:ea typeface="Calibri" pitchFamily="34" charset="-122"/>
                 <a:cs typeface="Calibri" pitchFamily="34" charset="-120"/>
               </a:rPr>
-              <a:t>All figures are simulation output under modelled assumptions.</a:t>
+              <a:t>Simulated financing magnitudes are simulation output under modelled assumptions.</a:t>
             </a:r>
             <a:endParaRPr lang="en-US" sz="1300" dirty="0"/>
           </a:p>
@@ -3976,7 +4054,7 @@
                 <a:ea typeface="Cambria" pitchFamily="34" charset="-122"/>
                 <a:cs typeface="Cambria" pitchFamily="34" charset="-120"/>
               </a:rPr>
-              <a:t>Every figure traces to a checksummed artifact</a:t>
+              <a:t>Every simulation result traces to a checksummed artifact</a:t>
             </a:r>
             <a:endParaRPr lang="en-US" sz="3200" dirty="0"/>
           </a:p>
@@ -4498,8 +4576,8 @@
         </p:nvSpPr>
         <p:spPr>
           <a:xfrm>
-            <a:off x="640080" y="5760720"/>
-            <a:ext cx="10881360" cy="411480"/>
+            <a:off x="640080" y="5715000"/>
+            <a:ext cx="10881360" cy="548640"/>
           </a:xfrm>
           <a:prstGeom prst="rect">
             <a:avLst/>
@@ -4512,6 +4590,9 @@
           <a:lstStyle/>
           <a:p>
             <a:pPr indent="0" marL="0">
+              <a:lnSpc>
+                <a:spcPts val="1500"/>
+              </a:lnSpc>
               <a:buNone/>
             </a:pPr>
             <a:r>
@@ -4523,7 +4604,7 @@
                 <a:ea typeface="Calibri" pitchFamily="34" charset="-122"/>
                 <a:cs typeface="Calibri" pitchFamily="34" charset="-120"/>
               </a:rPr>
-              <a:t>9 browser tests skip where no chromium build is available. They are reported as skips, never counted as passes.</a:t>
+              <a:t>Scope: simulation results are artifact-backed. Analytical results are derivation-backed and external facts are literature-backed; neither is covered by the checksum table. 9 browser tests skip where no chromium build is available — reported as skips, never counted as passes.</a:t>
             </a:r>
             <a:endParaRPr lang="en-US" sz="1100" dirty="0"/>
           </a:p>
@@ -4923,7 +5004,7 @@
                 <a:ea typeface="Calibri" pitchFamily="34" charset="-122"/>
                 <a:cs typeface="Calibri" pitchFamily="34" charset="-120"/>
               </a:rPr>
-              <a:t>Each payment is a fixed share of revenue, so the payment falls when revenue falls. Under adverse paths the payment burden stays roughly flat.</a:t>
+              <a:t>Each payment is a fixed share of net sales, so the payment falls when sales fall. Before the cap is reached and before the final clipped payment, burden holds roughly flat — while the net-sales/GMV ratio stays fixed.</a:t>
             </a:r>
             <a:endParaRPr lang="en-US" sz="1450" dirty="0"/>
           </a:p>
@@ -5065,7 +5146,7 @@
         </p:nvSpPr>
         <p:spPr>
           <a:xfrm>
-            <a:off x="640080" y="4572000"/>
+            <a:off x="640080" y="4343400"/>
             <a:ext cx="10881360" cy="457200"/>
           </a:xfrm>
           <a:prstGeom prst="rect">
@@ -5093,6 +5174,48 @@
               <a:t>Reporting either side alone misstates the contract. This paper reports both, always.</a:t>
             </a:r>
             <a:endParaRPr lang="en-US" sz="1700" dirty="0"/>
+          </a:p>
+        </p:txBody>
+      </p:sp>
+      <p:sp>
+        <p:nvSpPr>
+          <p:cNvPr id="12" name="Text 10"/>
+          <p:cNvSpPr/>
+          <p:nvPr/>
+        </p:nvSpPr>
+        <p:spPr>
+          <a:xfrm>
+            <a:off x="640080" y="4846320"/>
+            <a:ext cx="10881360" cy="640080"/>
+          </a:xfrm>
+          <a:prstGeom prst="rect">
+            <a:avLst/>
+          </a:prstGeom>
+          <a:noFill/>
+          <a:ln/>
+        </p:spPr>
+        <p:txBody>
+          <a:bodyPr wrap="square" lIns="0" tIns="0" rIns="0" bIns="0" rtlCol="0" anchor="ctr"/>
+          <a:lstStyle/>
+          <a:p>
+            <a:pPr indent="0" marL="0">
+              <a:lnSpc>
+                <a:spcPts val="1600"/>
+              </a:lnSpc>
+              <a:buNone/>
+            </a:pPr>
+            <a:r>
+              <a:rPr lang="en-US" sz="1150" dirty="0">
+                <a:solidFill>
+                  <a:srgbClr val="6B6B6B"/>
+                </a:solidFill>
+                <a:latin typeface="Calibri" pitchFamily="34" charset="0"/>
+                <a:ea typeface="Calibri" pitchFamily="34" charset="-122"/>
+                <a:cs typeface="Calibri" pitchFamily="34" charset="-120"/>
+              </a:rPr>
+              <a:t>Contractual burden on net sales is flat by definition (P1). The burden shown throughout this deck uses payment ÷ GMV, so it equals r·(1 − return rate) and moves when the return rate moves — as in the returns_spike scenario.</a:t>
+            </a:r>
+            <a:endParaRPr lang="en-US" sz="1150" dirty="0"/>
           </a:p>
         </p:txBody>
       </p:sp>
@@ -5573,7 +5696,7 @@
                 <a:ea typeface="Cambria" pitchFamily="34" charset="-122"/>
                 <a:cs typeface="Cambria" pitchFamily="34" charset="-120"/>
               </a:rPr>
-              <a:t>Three arms, matched on cost</a:t>
+              <a:t>Three arms on identical paths — one matched pair</a:t>
             </a:r>
             <a:endParaRPr lang="en-US" sz="3200" dirty="0"/>
           </a:p>
@@ -6083,7 +6206,7 @@
                 <a:ea typeface="Calibri" pitchFamily="34" charset="-122"/>
                 <a:cs typeface="Calibri" pitchFamily="34" charset="-120"/>
               </a:rPr>
-              <a:t>The 18% is an assumed input — not a market rate, not observed.</a:t>
+              <a:t>An external price reference — NOT cost-matched. The 18% is an assumed input, not a market rate.</a:t>
             </a:r>
             <a:endParaRPr lang="en-US" sz="1100" dirty="0"/>
           </a:p>
@@ -6097,7 +6220,7 @@
         </p:nvSpPr>
         <p:spPr>
           <a:xfrm>
-            <a:off x="640080" y="4892040"/>
+            <a:off x="640080" y="4846320"/>
             <a:ext cx="10881360" cy="457200"/>
           </a:xfrm>
           <a:prstGeom prst="rect">
@@ -6122,15 +6245,54 @@
                 <a:ea typeface="Calibri" pitchFamily="34" charset="-122"/>
                 <a:cs typeface="Calibri" pitchFamily="34" charset="-120"/>
               </a:rPr>
+              <a:t>All arms run on identical generated paths. Only the RBF / matched-fixed pair is cost-matched — principal, total repayment and term are equal on the reference path.</a:t>
+            </a:r>
+            <a:endParaRPr lang="en-US" sz="1400" dirty="0"/>
+          </a:p>
+        </p:txBody>
+      </p:sp>
+      <p:sp>
+        <p:nvSpPr>
+          <p:cNvPr id="19" name="Text 17"/>
+          <p:cNvSpPr/>
+          <p:nvPr/>
+        </p:nvSpPr>
+        <p:spPr>
+          <a:xfrm>
+            <a:off x="640080" y="5349240"/>
+            <a:ext cx="10881360" cy="411480"/>
+          </a:xfrm>
+          <a:prstGeom prst="rect">
+            <a:avLst/>
+          </a:prstGeom>
+          <a:noFill/>
+          <a:ln/>
+        </p:spPr>
+        <p:txBody>
+          <a:bodyPr wrap="square" lIns="0" tIns="0" rIns="0" bIns="0" rtlCol="0" anchor="ctr"/>
+          <a:lstStyle/>
+          <a:p>
+            <a:pPr indent="0" marL="0">
+              <a:buNone/>
+            </a:pPr>
+            <a:r>
+              <a:rPr lang="en-US" sz="1250" dirty="0">
+                <a:solidFill>
+                  <a:srgbClr val="444444"/>
+                </a:solidFill>
+                <a:latin typeface="Calibri" pitchFamily="34" charset="0"/>
+                <a:ea typeface="Calibri" pitchFamily="34" charset="-122"/>
+                <a:cs typeface="Calibri" pitchFamily="34" charset="-120"/>
+              </a:rPr>
               <a:t>At f = 1.20 the matched term is 13 months at 17,076,923 VND/month; at f* = 1.0945 it is 12 months at 16,873,542 VND/month.</a:t>
             </a:r>
-            <a:endParaRPr lang="en-US" sz="1400" dirty="0"/>
-          </a:p>
-        </p:txBody>
-      </p:sp>
-      <p:sp>
-        <p:nvSpPr>
-          <p:cNvPr id="19" name="Text 17"/>
+            <a:endParaRPr lang="en-US" sz="1250" dirty="0"/>
+          </a:p>
+        </p:txBody>
+      </p:sp>
+      <p:sp>
+        <p:nvSpPr>
+          <p:cNvPr id="20" name="Text 18"/>
           <p:cNvSpPr/>
           <p:nvPr/>
         </p:nvSpPr>
@@ -7187,7 +7349,7 @@
                 <a:ea typeface="Calibri" pitchFamily="34" charset="-122"/>
                 <a:cs typeface="Calibri" pitchFamily="34" charset="-120"/>
               </a:rPr>
-              <a:t>It survived several drafts, written by authors actively trying to avoid exactly this error.</a:t>
+              <a:t>It survived several earlier drafts of this project, written while actively trying to avoid exactly this error.</a:t>
             </a:r>
             <a:endParaRPr lang="en-US" sz="1500" dirty="0"/>
           </a:p>
@@ -7375,7 +7537,7 @@
                 <a:ea typeface="Calibri" pitchFamily="34" charset="-122"/>
                 <a:cs typeface="Calibri" pitchFamily="34" charset="-120"/>
               </a:rPr>
-              <a:t>A temporary three-month cessation leaves 2.0% of paths incomplete at f = 1.20 and none at f*. Permanent closure before the 13-month matched term leaves every path incomplete.</a:t>
+              <a:t>A temporary three-month cessation leaves 2.0% of paths incomplete at f = 1.20 and none at f*. Closure from month 7 leaves every path incomplete under both cap factors.</a:t>
             </a:r>
             <a:endParaRPr lang="en-US" sz="1400" dirty="0"/>
           </a:p>
@@ -7499,8 +7661,8 @@
         </p:nvSpPr>
         <p:spPr>
           <a:xfrm>
-            <a:off x="1508760" y="1627632"/>
-            <a:ext cx="2651760" cy="274320"/>
+            <a:off x="640080" y="1298448"/>
+            <a:ext cx="10881360" cy="274320"/>
           </a:xfrm>
           <a:prstGeom prst="rect">
             <a:avLst/>
@@ -7516,17 +7678,17 @@
               <a:buNone/>
             </a:pPr>
             <a:r>
-              <a:rPr lang="en-US" sz="1100" b="1" dirty="0">
-                <a:solidFill>
-                  <a:srgbClr val="6B6B6B"/>
+              <a:rPr lang="en-US" sz="1200" b="1" dirty="0">
+                <a:solidFill>
+                  <a:srgbClr val="D55E00"/>
                 </a:solidFill>
                 <a:latin typeface="Calibri" pitchFamily="34" charset="0"/>
                 <a:ea typeface="Calibri" pitchFamily="34" charset="-122"/>
                 <a:cs typeface="Calibri" pitchFamily="34" charset="-120"/>
               </a:rPr>
-              <a:t>Scenario</a:t>
-            </a:r>
-            <a:endParaRPr lang="en-US" sz="1100" dirty="0"/>
+              <a:t>All figures on this slide are the illustrative cap factor f = 1.20.</a:t>
+            </a:r>
+            <a:endParaRPr lang="en-US" sz="1200" dirty="0"/>
           </a:p>
         </p:txBody>
       </p:sp>
@@ -7538,8 +7700,8 @@
         </p:nvSpPr>
         <p:spPr>
           <a:xfrm>
-            <a:off x="4206240" y="1627632"/>
-            <a:ext cx="2194560" cy="274320"/>
+            <a:off x="1508760" y="1627632"/>
+            <a:ext cx="2651760" cy="274320"/>
           </a:xfrm>
           <a:prstGeom prst="rect">
             <a:avLst/>
@@ -7563,7 +7725,7 @@
                 <a:ea typeface="Calibri" pitchFamily="34" charset="-122"/>
                 <a:cs typeface="Calibri" pitchFamily="34" charset="-120"/>
               </a:rPr>
-              <a:t>Not reaching target</a:t>
+              <a:t>Scenario</a:t>
             </a:r>
             <a:endParaRPr lang="en-US" sz="1100" dirty="0"/>
           </a:p>
@@ -7577,8 +7739,8 @@
         </p:nvSpPr>
         <p:spPr>
           <a:xfrm>
-            <a:off x="6492240" y="1627632"/>
-            <a:ext cx="2468880" cy="274320"/>
+            <a:off x="4206240" y="1627632"/>
+            <a:ext cx="2194560" cy="274320"/>
           </a:xfrm>
           <a:prstGeom prst="rect">
             <a:avLst/>
@@ -7602,7 +7764,7 @@
                 <a:ea typeface="Calibri" pitchFamily="34" charset="-122"/>
                 <a:cs typeface="Calibri" pitchFamily="34" charset="-120"/>
               </a:rPr>
-              <a:t>Amount recovered</a:t>
+              <a:t>Not reaching target</a:t>
             </a:r>
             <a:endParaRPr lang="en-US" sz="1100" dirty="0"/>
           </a:p>
@@ -7616,8 +7778,8 @@
         </p:nvSpPr>
         <p:spPr>
           <a:xfrm>
-            <a:off x="9052560" y="1627632"/>
-            <a:ext cx="2286000" cy="274320"/>
+            <a:off x="6492240" y="1627632"/>
+            <a:ext cx="2468880" cy="274320"/>
           </a:xfrm>
           <a:prstGeom prst="rect">
             <a:avLst/>
@@ -7641,6 +7803,45 @@
                 <a:ea typeface="Calibri" pitchFamily="34" charset="-122"/>
                 <a:cs typeface="Calibri" pitchFamily="34" charset="-120"/>
               </a:rPr>
+              <a:t>Amount recovered</a:t>
+            </a:r>
+            <a:endParaRPr lang="en-US" sz="1100" dirty="0"/>
+          </a:p>
+        </p:txBody>
+      </p:sp>
+      <p:sp>
+        <p:nvSpPr>
+          <p:cNvPr id="7" name="Text 5"/>
+          <p:cNvSpPr/>
+          <p:nvPr/>
+        </p:nvSpPr>
+        <p:spPr>
+          <a:xfrm>
+            <a:off x="9052560" y="1627632"/>
+            <a:ext cx="2286000" cy="274320"/>
+          </a:xfrm>
+          <a:prstGeom prst="rect">
+            <a:avLst/>
+          </a:prstGeom>
+          <a:noFill/>
+          <a:ln/>
+        </p:spPr>
+        <p:txBody>
+          <a:bodyPr wrap="square" lIns="0" tIns="0" rIns="0" bIns="0" rtlCol="0" anchor="ctr"/>
+          <a:lstStyle/>
+          <a:p>
+            <a:pPr indent="0" marL="0">
+              <a:buNone/>
+            </a:pPr>
+            <a:r>
+              <a:rPr lang="en-US" sz="1100" b="1" dirty="0">
+                <a:solidFill>
+                  <a:srgbClr val="6B6B6B"/>
+                </a:solidFill>
+                <a:latin typeface="Calibri" pitchFamily="34" charset="0"/>
+                <a:ea typeface="Calibri" pitchFamily="34" charset="-122"/>
+                <a:cs typeface="Calibri" pitchFamily="34" charset="-120"/>
+              </a:rPr>
               <a:t>vs 185M advance</a:t>
             </a:r>
             <a:endParaRPr lang="en-US" sz="1100" dirty="0"/>
@@ -7649,7 +7850,7 @@
       </p:sp>
       <p:sp>
         <p:nvSpPr>
-          <p:cNvPr id="7" name="Shape 5"/>
+          <p:cNvPr id="8" name="Shape 6"/>
           <p:cNvSpPr/>
           <p:nvPr/>
         </p:nvSpPr>
@@ -7676,7 +7877,7 @@
       </p:sp>
       <p:sp>
         <p:nvSpPr>
-          <p:cNvPr id="8" name="Shape 6"/>
+          <p:cNvPr id="9" name="Shape 7"/>
           <p:cNvSpPr/>
           <p:nvPr/>
         </p:nvSpPr>
@@ -7696,7 +7897,7 @@
       </p:sp>
       <p:sp>
         <p:nvSpPr>
-          <p:cNvPr id="9" name="Text 7"/>
+          <p:cNvPr id="10" name="Text 8"/>
           <p:cNvSpPr/>
           <p:nvPr/>
         </p:nvSpPr>
@@ -7735,7 +7936,7 @@
       </p:sp>
       <p:sp>
         <p:nvSpPr>
-          <p:cNvPr id="10" name="Text 8"/>
+          <p:cNvPr id="11" name="Text 9"/>
           <p:cNvSpPr/>
           <p:nvPr/>
         </p:nvSpPr>
@@ -7766,7 +7967,7 @@
                 <a:ea typeface="Calibri" pitchFamily="34" charset="-122"/>
                 <a:cs typeface="Calibri" pitchFamily="34" charset="-120"/>
               </a:rPr>
-              <a:t>76.2% of paths</a:t>
+              <a:t>76.2% at f = 1.20</a:t>
             </a:r>
             <a:endParaRPr lang="en-US" sz="1400" dirty="0"/>
           </a:p>
@@ -7774,7 +7975,7 @@
       </p:sp>
       <p:sp>
         <p:nvSpPr>
-          <p:cNvPr id="11" name="Text 9"/>
+          <p:cNvPr id="12" name="Text 10"/>
           <p:cNvSpPr/>
           <p:nvPr/>
         </p:nvSpPr>
@@ -7805,7 +8006,7 @@
                 <a:ea typeface="Calibri" pitchFamily="34" charset="-122"/>
                 <a:cs typeface="Calibri" pitchFamily="34" charset="-120"/>
               </a:rPr>
-              <a:t>≈ 214.3M VND</a:t>
+              <a:t>≈ 214.3M VND at f = 1.20</a:t>
             </a:r>
             <a:endParaRPr lang="en-US" sz="1400" dirty="0"/>
           </a:p>
@@ -7813,7 +8014,7 @@
       </p:sp>
       <p:sp>
         <p:nvSpPr>
-          <p:cNvPr id="12" name="Text 10"/>
+          <p:cNvPr id="13" name="Text 11"/>
           <p:cNvSpPr/>
           <p:nvPr/>
         </p:nvSpPr>
@@ -7852,7 +8053,7 @@
       </p:sp>
       <p:sp>
         <p:nvSpPr>
-          <p:cNvPr id="13" name="Shape 11"/>
+          <p:cNvPr id="14" name="Shape 12"/>
           <p:cNvSpPr/>
           <p:nvPr/>
         </p:nvSpPr>
@@ -7879,7 +8080,7 @@
       </p:sp>
       <p:sp>
         <p:nvSpPr>
-          <p:cNvPr id="14" name="Shape 12"/>
+          <p:cNvPr id="15" name="Shape 13"/>
           <p:cNvSpPr/>
           <p:nvPr/>
         </p:nvSpPr>
@@ -7899,7 +8100,7 @@
       </p:sp>
       <p:sp>
         <p:nvSpPr>
-          <p:cNvPr id="15" name="Text 13"/>
+          <p:cNvPr id="16" name="Text 14"/>
           <p:cNvSpPr/>
           <p:nvPr/>
         </p:nvSpPr>
@@ -7938,7 +8139,7 @@
       </p:sp>
       <p:sp>
         <p:nvSpPr>
-          <p:cNvPr id="16" name="Text 14"/>
+          <p:cNvPr id="17" name="Text 15"/>
           <p:cNvSpPr/>
           <p:nvPr/>
         </p:nvSpPr>
@@ -7969,7 +8170,7 @@
                 <a:ea typeface="Calibri" pitchFamily="34" charset="-122"/>
                 <a:cs typeface="Calibri" pitchFamily="34" charset="-120"/>
               </a:rPr>
-              <a:t>100% of paths</a:t>
+              <a:t>100% at both f</a:t>
             </a:r>
             <a:endParaRPr lang="en-US" sz="1400" dirty="0"/>
           </a:p>
@@ -7977,7 +8178,7 @@
       </p:sp>
       <p:sp>
         <p:nvSpPr>
-          <p:cNvPr id="17" name="Text 15"/>
+          <p:cNvPr id="18" name="Text 16"/>
           <p:cNvSpPr/>
           <p:nvPr/>
         </p:nvSpPr>
@@ -8008,7 +8209,7 @@
                 <a:ea typeface="Calibri" pitchFamily="34" charset="-122"/>
                 <a:cs typeface="Calibri" pitchFamily="34" charset="-120"/>
               </a:rPr>
-              <a:t>≈ 98.3M VND</a:t>
+              <a:t>≈ 98.3M VND at both f</a:t>
             </a:r>
             <a:endParaRPr lang="en-US" sz="1400" dirty="0"/>
           </a:p>
@@ -8016,7 +8217,7 @@
       </p:sp>
       <p:sp>
         <p:nvSpPr>
-          <p:cNvPr id="18" name="Text 16"/>
+          <p:cNvPr id="19" name="Text 17"/>
           <p:cNvSpPr/>
           <p:nvPr/>
         </p:nvSpPr>
@@ -8055,7 +8256,7 @@
       </p:sp>
       <p:sp>
         <p:nvSpPr>
-          <p:cNvPr id="19" name="Text 17"/>
+          <p:cNvPr id="20" name="Text 18"/>
           <p:cNvSpPr/>
           <p:nvPr/>
         </p:nvSpPr>
@@ -8089,7 +8290,7 @@
                 <a:ea typeface="Calibri" pitchFamily="34" charset="-122"/>
                 <a:cs typeface="Calibri" pitchFamily="34" charset="-120"/>
               </a:rPr>
-              <a:t>A 76.2% incomplete-recovery rate is not a 76.2% loss rate.</a:t>
+              <a:t>A 76.2% incomplete-recovery rate at f = 1.20 is not a 76.2% loss rate.</a:t>
             </a:r>
             <a:endParaRPr lang="en-US" sz="1400" dirty="0"/>
           </a:p>
@@ -8109,7 +8310,7 @@
                 <a:ea typeface="Calibri" pitchFamily="34" charset="-122"/>
                 <a:cs typeface="Calibri" pitchFamily="34" charset="-120"/>
               </a:rPr>
-              <a:t>Incomplete recovery means the contractual target was not reached. Whether that touches principal depends on how much was recovered. Closure at month 7 recovers the same absolute amount at both cap factors — that path is revenue-limited, not cap-limited.</a:t>
+              <a:t>Incomplete recovery means the contractual target was not reached. Whether that touches principal depends on how much was recovered. At f* = 1.0945 the same scenario fails on only 7.6% of paths — the rate is a function of the price. Closure at month 7 recovers the same absolute amount at both cap factors, because that path is revenue-limited rather than cap-limited.</a:t>
             </a:r>
             <a:endParaRPr lang="en-US" sz="1400" dirty="0"/>
           </a:p>
@@ -8117,7 +8318,7 @@
       </p:sp>
       <p:sp>
         <p:nvSpPr>
-          <p:cNvPr id="20" name="Text 18"/>
+          <p:cNvPr id="21" name="Text 19"/>
           <p:cNvSpPr/>
           <p:nvPr/>
         </p:nvSpPr>

--- a/research/publication/RBF_DECK.pptx
+++ b/research/publication/RBF_DECK.pptx
@@ -4248,7 +4248,7 @@
                 <a:ea typeface="Cambria" pitchFamily="34" charset="-122"/>
                 <a:cs typeface="Cambria" pitchFamily="34" charset="-120"/>
               </a:rPr>
-              <a:t>1,008</a:t>
+              <a:t>1,018</a:t>
             </a:r>
             <a:endParaRPr lang="en-US" sz="3400" dirty="0"/>
           </a:p>
@@ -4290,7 +4290,7 @@
                 <a:ea typeface="Calibri" pitchFamily="34" charset="-122"/>
                 <a:cs typeface="Calibri" pitchFamily="34" charset="-120"/>
               </a:rPr>
-              <a:t>tests passing — 379 backend,</a:t>
+              <a:t>tests passing — 389 backend,</a:t>
             </a:r>
             <a:endParaRPr lang="en-US" sz="1200" dirty="0"/>
           </a:p>

--- a/research/publication/RBF_DECK.pptx
+++ b/research/publication/RBF_DECK.pptx
@@ -1547,7 +1547,13 @@
           <a:p>
             <a:r>
               <a:rPr lang="en-US" dirty="0"/>
-              <a:t>Reporting the 11.99 without the 76.2% would invert the finding. Survivor statistics describe the contracts that finished, not the portfolio.</a:t>
+              <a:t>Reporting the 11.99 without the 76.2% would invert the finding. Survivor statistics describe the contracts that finished, not the portfolio.
+[Sources]
+  · baseline_closure_v1_canonical.json → /scenarios/closure_m13/RBF/duration_mean, /incomplete_recovery_rate
+  · Conditioning on a non-random subsample is a specification error: L-36 Heckman (1979)
+  · Conditioning on a common effect: L-37 Hernán, Hernández-Díaz &amp; Robins (2004)
+  · Right-censoring machinery: L-32 Kaplan &amp; Meier (1958), L-33 Klein &amp; Moeschberger (2003)
+  · Duration data in economics: L-34 Lancaster (1990), L-35 Van den Berg (2001)</a:t>
             </a:r>
             <a:endParaRPr lang="en-US" dirty="0"/>
           </a:p>
@@ -1635,7 +1641,12 @@
           <a:p>
             <a:r>
               <a:rPr lang="en-US" dirty="0"/>
-              <a:t>Say this section out loud in any interview. The restraint is the credential.</a:t>
+              <a:t>Say this section out loud in any interview. The restraint is the credential.
+[Sources]
+  · Circularity evidence: R-000 | research/analysis/00_audit_evidence.py — generating-function AUC 0.9098 vs reported ensemble 0.9182
+  · Leakage inflating apparent performance, 294 papers across 17 fields: L-38 Kapoor &amp; Narayanan (2023)
+  · Synthetic-data limits: L-39 van Breugel et al. (2023), L-40 Jordon et al. (2022)
+  · No source states the specific circularity result (Gap S-1); argued from our own evidence</a:t>
             </a:r>
             <a:endParaRPr lang="en-US" dirty="0"/>
           </a:p>
@@ -1723,7 +1734,15 @@
           <a:p>
             <a:r>
               <a:rPr lang="en-US" dirty="0"/>
-              <a:t>The corrected reproducibility claim is a better credential than the overstated one would have been. If asked: the checksum table covers simulation output only — proofs are backed by DERIVATIONS.md and cited facts by the literature matrix.</a:t>
+              <a:t>The corrected reproducibility claim is a better credential than the overstated one would have been. If asked: the checksum table covers simulation output only — proofs are backed by DERIVATIONS.md and cited facts by the literature matrix.
+[Sources]
+  · Five registered SHA-256 digests: MANUSCRIPT.md §15; RESULTS_REGISTRY.md
+  · Byte vs numeric equality, reported separately: research/verify_reproduction.py (D-041)
+  · 44 verified sources and 6 stated gaps: LITERATURE_MATRIX.md §0.1, §9
+  · Test counts and the environment-dependent browser skip: RESEARCH_MANIFEST.md
+  · Researcher degrees of freedom in simulation design: L-31 Pawel, Kook &amp; Reeve (2024)
+  · Simulation-study reporting practice: L-27 Morris, White &amp; Crowther (2019)
+  · Monte Carlo interval is not a confidence interval: L-28, L-29 (coverage interval)</a:t>
             </a:r>
             <a:endParaRPr lang="en-US" dirty="0"/>
           </a:p>
@@ -1899,7 +1918,13 @@
           <a:p>
             <a:r>
               <a:rPr lang="en-US" dirty="0"/>
-              <a:t>The whole argument in one slide. The two cards are the same fact. If asked why 'roughly' flat: the final payment is clipped to the remaining balance, and the displayed denominator is GMV rather than net sales.</a:t>
+              <a:t>The whole argument in one slide. The two cards are the same fact. If asked why 'roughly' flat: the final payment is clipped to the remaining balance, and the displayed denominator is GMV rather than net sales. If asked whether recovery is always slower: no — P4 gives the exact condition and both directions occur here.
+[Sources]
+  · Contractual burden flat by definition: DERIVATIONS.md P1
+  · Fixed burden has elasticity −1: DERIVATIONS.md P2
+  · Recovery ordering condition, realised mean base against B* = P/r: DERIVATIONS.md P4
+  · Burden denominator disclosure (payment ÷ GMV): MANUSCRIPT.md §6.1; spec amendment A-1
+  · Income-linked repayment as automatic insurance: L-15 Barr et al. (2019)</a:t>
             </a:r>
             <a:endParaRPr lang="en-US" dirty="0"/>
           </a:p>
@@ -1987,7 +2012,12 @@
           <a:p>
             <a:r>
               <a:rPr lang="en-US" dirty="0"/>
-              <a:t>Be precise about the negative claim. It is scoped to our searches, and that scoping is deliberate.</a:t>
+              <a:t>Be precise about the negative claim. It is scoped to our searches, and that scoping is deliberate.
+[Sources]
+  · Search protocol and inclusion rules: LITERATURE_MATRIX.md §0.1, documented through 2026-08-13
+  · Gap R-1 — no peer-reviewed study of the US merchant cash advance market found in those searches
+  · Gap R-2 — no head-to-head burden/recovery comparison for small-business financing found
+  · Closest published work: L-07 Russel, Shi &amp; Clarke (2025), South African payments platform</a:t>
             </a:r>
             <a:endParaRPr lang="en-US" dirty="0"/>
           </a:p>
@@ -2075,7 +2105,11 @@
           <a:p>
             <a:r>
               <a:rPr lang="en-US" dirty="0"/>
-              <a:t>Two distinct ideas, do not merge them. Pairing = every arm sees the same generated path. Cost-matching = only RBF and FIX-A share principal, total and term. FIX-B is an outside price reference and is not matched to anything; its 18% is an assumption of ours.</a:t>
+              <a:t>Two distinct ideas, do not merge them. Pairing = every arm sees the same generated path. Cost-matching = only RBF and FIX-A share principal, total and term. FIX-B is an outside price reference and is not matched to anything; its 18% is an assumption of ours.
+[Sources]
+  · Matched terms: baseline_v2_canonical.json and baseline_equalcost_v1_canonical.json → /match_benchmark_a
+  · FIX-B’s 18% nominal is an assumed input, not a market rate — spec amendment A-8
+  · Factor rate and APR are not commensurable without conversion: L-23 (NY 23 NYCRR 600), L-24 (California)</a:t>
             </a:r>
             <a:endParaRPr lang="en-US" dirty="0"/>
           </a:p>
@@ -2163,7 +2197,12 @@
           <a:p>
             <a:r>
               <a:rPr lang="en-US" dirty="0"/>
-              <a:t>Never show the left chart without the right one. That pairing is the paper's central discipline.</a:t>
+              <a:t>Never show the left chart without the right one. That pairing is the paper's central discipline. The pairing rule is general; this scenario's direction is not.
+[Sources]
+  · S-1 | baseline_v2_canonical.json → /scenarios/severe_downturn
+  · Burden must be read across the distribution, not at the mean: L-13 Chapman et al. (2010)
+  · Fixed schedules concentrate burden in low-income states: L-12 Chapman &amp; Lounkaew (2015)
+  · 15% band is illustrative, chosen for this study — ledger Q-4, not a validated hardship cutoff</a:t>
             </a:r>
             <a:endParaRPr lang="en-US" dirty="0"/>
           </a:p>
@@ -2251,7 +2290,11 @@
           <a:p>
             <a:r>
               <a:rPr lang="en-US" dirty="0"/>
-              <a:t>This is the contribution. Both halves of the last line matter — separable is not the same as outcome-independent.</a:t>
+              <a:t>This is the contribution. Both halves of the last line matter — separable is not the same as outcome-independent.
+[Sources]
+  · P-1, P-2 | validation_v1_canonical.json → /pricing/equal_cost, /pricing/benchmark_b_apr
+  · Separability of price and payment rule: DERIVATIONS.md P6(a), P6(b)
+  · Contingency can carry a premium in other domains — L-18 (human capital), L-19 (sovereign). Neither is SME finance; no general rule is claimed</a:t>
             </a:r>
             <a:endParaRPr lang="en-US" dirty="0"/>
           </a:p>
@@ -2339,7 +2382,13 @@
           <a:p>
             <a:r>
               <a:rPr lang="en-US" dirty="0"/>
-              <a:t>Interviewers respond well to this slide. It demonstrates the discipline rather than asserting it.</a:t>
+              <a:t>Interviewers respond well to this slide. It demonstrates the discipline rather than asserting it.
+[Sources]
+  · Retraction recorded at D-015; CORRECTED_CLAIMS.md #2; CLAIM_LEDGER.md §6
+  · Target proportional to f, APR jointly determined: DERIVATIONS.md P6(a), P6(b)
+  · California SB 362 (2025), Chapter 352 — L-45, SECTION 1(e)(3) and Financial Code §22806
+  · New York 23 NYCRR 600 commercial financing disclosure — L-23
+  · California 2018 statute and 2022 implementing regulations — L-24; federal preemption determination — L-25</a:t>
             </a:r>
             <a:endParaRPr lang="en-US" dirty="0"/>
           </a:p>
@@ -2427,7 +2476,11 @@
           <a:p>
             <a:r>
               <a:rPr lang="en-US" dirty="0"/>
-              <a:t>Note the price effect: closure_m13 falls from 76.2% to 7.6% on the cap factor alone. Same structure, nearer threshold.</a:t>
+              <a:t>Note the price effect: closure_m13 falls from 76.2% to 7.6% on the cap factor alone. Same structure, nearer threshold.
+[Sources]
+  · S-3 | baseline_closure_v1_canonical.json → /scenarios/*/RBF/incomplete_recovery_rate
+  · S-4 | baseline_closure_equalcost_v1_canonical.json → same paths
+  · Why a nearer cap completes sooner: DERIVATIONS.md P6(a), P7</a:t>
             </a:r>
             <a:endParaRPr lang="en-US" dirty="0"/>
           </a:p>
@@ -2515,7 +2568,10 @@
           <a:p>
             <a:r>
               <a:rPr lang="en-US" dirty="0"/>
-              <a:t>This is the slide that stops the headline failure rate being misread as a loss rate.</a:t>
+              <a:t>This is the slide that stops the headline failure rate being misread as a loss rate.
+[Sources]
+  · I-3 | recovered amount = /scenarios/*/RBF/recovery_ratio/24 × /terms/cap, both closure artifacts; advance from /terms/A
+  · closure_m7 is revenue-limited rather than cap-limited, hence identical at both cap factors</a:t>
             </a:r>
             <a:endParaRPr lang="en-US" dirty="0"/>
           </a:p>
@@ -4248,7 +4304,7 @@
                 <a:ea typeface="Cambria" pitchFamily="34" charset="-122"/>
                 <a:cs typeface="Cambria" pitchFamily="34" charset="-120"/>
               </a:rPr>
-              <a:t>1,018</a:t>
+              <a:t>1,030</a:t>
             </a:r>
             <a:endParaRPr lang="en-US" sz="3400" dirty="0"/>
           </a:p>
@@ -4290,7 +4346,7 @@
                 <a:ea typeface="Calibri" pitchFamily="34" charset="-122"/>
                 <a:cs typeface="Calibri" pitchFamily="34" charset="-120"/>
               </a:rPr>
-              <a:t>tests passing — 389 backend,</a:t>
+              <a:t>tests passing — 401 backend,</a:t>
             </a:r>
             <a:endParaRPr lang="en-US" sz="1200" dirty="0"/>
           </a:p>
@@ -5132,7 +5188,7 @@
                 <a:ea typeface="Calibri" pitchFamily="34" charset="-122"/>
                 <a:cs typeface="Calibri" pitchFamily="34" charset="-120"/>
               </a:rPr>
-              <a:t>The same mechanism delays recovery, and where revenue stops before the cap is reached, a contractual balance goes unrecovered.</a:t>
+              <a:t>The same mechanism moves recovery — it may lead or lag a cost-matched fixed schedule depending on the realised path (P4). In the severe downturn it lags. Where revenue stops before the cap is reached, a contractual balance goes unrecovered.</a:t>
             </a:r>
             <a:endParaRPr lang="en-US" sz="1450" dirty="0"/>
           </a:p>
@@ -6465,7 +6521,7 @@
                 <a:ea typeface="Calibri" pitchFamily="34" charset="-122"/>
                 <a:cs typeface="Calibri" pitchFamily="34" charset="-120"/>
               </a:rPr>
-              <a:t>The burden reduction and the recovery delay are one mechanism. Mean duration extends 13 → 18.718 months.</a:t>
+              <a:t>In this scenario the burden reduction and the recovery delay are one mechanism. Mean duration extends 13 → 18.718 months. The pairing rule is general; the direction is scenario-specific.</a:t>
             </a:r>
             <a:endParaRPr lang="en-US" sz="1500" dirty="0"/>
           </a:p>
@@ -7307,7 +7363,7 @@
                 <a:ea typeface="Calibri" pitchFamily="34" charset="-122"/>
                 <a:cs typeface="Calibri" pitchFamily="34" charset="-120"/>
               </a:rPr>
-              <a:t>It fixed f = 1.20 as though it were intrinsic — total contractual cost is proportional to f.</a:t>
+              <a:t>It fixed f = 1.20 as though it were intrinsic. The contractual repayment target A × f is proportional to f — and realised repayment equals that target only when the contract completes.</a:t>
             </a:r>
             <a:endParaRPr lang="en-US" sz="1500" dirty="0"/>
           </a:p>

--- a/research/publication/RBF_DECK.pptx
+++ b/research/publication/RBF_DECK.pptx
@@ -1830,7 +1830,11 @@
           <a:p>
             <a:r>
               <a:rPr lang="en-US" dirty="0"/>
-              <a:t>Close on the limitation, not on the result. It is the most defensible note to end on.</a:t>
+              <a:t>Close on the limitation, not on the result. It is the most defensible note to end on. Be clear that the calibration/identification split is our own reasoning about method, not a result we measured and not a finding we are attributing to anyone else.
+[Sources]
+  · Calibration versus causal identification: this project's own methodological inference, argued in MANUSCRIPT.md §13. No external source is cited for it, and none should be invented
+  · Why observational data cannot supply the counterfactual: each seller takes at most one contract — MANUSCRIPT.md §2, Gap R-2
+  · Search protocol behind that gap: LITERATURE_MATRIX.md §0.1, documented through 2026-08-13</a:t>
             </a:r>
             <a:endParaRPr lang="en-US" dirty="0"/>
           </a:p>
@@ -4346,7 +4350,7 @@
                 <a:ea typeface="Calibri" pitchFamily="34" charset="-122"/>
                 <a:cs typeface="Calibri" pitchFamily="34" charset="-120"/>
               </a:rPr>
-              <a:t>tests passing — 401 backend,</a:t>
+              <a:t>non-browser tests passing —</a:t>
             </a:r>
             <a:endParaRPr lang="en-US" sz="1200" dirty="0"/>
           </a:p>
@@ -4366,7 +4370,7 @@
                 <a:ea typeface="Calibri" pitchFamily="34" charset="-122"/>
                 <a:cs typeface="Calibri" pitchFamily="34" charset="-120"/>
               </a:rPr>
-              <a:t>629 simulation</a:t>
+              <a:t>401 backend, 629 simulation</a:t>
             </a:r>
             <a:endParaRPr lang="en-US" sz="1200" dirty="0"/>
           </a:p>
@@ -4660,7 +4664,7 @@
                 <a:ea typeface="Calibri" pitchFamily="34" charset="-122"/>
                 <a:cs typeface="Calibri" pitchFamily="34" charset="-120"/>
               </a:rPr>
-              <a:t>Scope: simulation results are artifact-backed. Analytical results are derivation-backed and external facts are literature-backed; neither is covered by the checksum table. 9 browser tests skip where no chromium build is available — reported as skips, never counted as passes.</a:t>
+              <a:t>Scope: simulation results are artifact-backed. Analytical results are derivation-backed and external facts are literature-backed; neither is covered by the checksum table. The 1,030 figure is non-browser: 401 backend and 629 simulation. Nine browser checks are defined and excluded from it; they passed in the earlier browser-capable run recorded at D-036, and skip where Playwright or Chromium is absent.</a:t>
             </a:r>
             <a:endParaRPr lang="en-US" sz="1100" dirty="0"/>
           </a:p>
@@ -5188,7 +5192,7 @@
                 <a:ea typeface="Calibri" pitchFamily="34" charset="-122"/>
                 <a:cs typeface="Calibri" pitchFamily="34" charset="-120"/>
               </a:rPr>
-              <a:t>The same mechanism moves recovery — it may lead or lag a cost-matched fixed schedule depending on the realised path (P4). In the severe downturn it lags. Where revenue stops before the cap is reached, a contractual balance goes unrecovered.</a:t>
+              <a:t>The same mechanism moves recovery — it may lead or lag a cost-matched fixed schedule depending on the realised path (P4). In the severe downturn it lags. Where revenue permanently stops before completion while a contractual balance remains, no further payment occurs and the balance remains unrecovered.</a:t>
             </a:r>
             <a:endParaRPr lang="en-US" sz="1450" dirty="0"/>
           </a:p>

--- a/research/publication/RBF_DECK.pptx
+++ b/research/publication/RBF_DECK.pptx
@@ -1549,7 +1549,7 @@
               <a:rPr lang="en-US" dirty="0"/>
               <a:t>Reporting the 11.99 without the 76.2% would invert the finding. Survivor statistics describe the contracts that finished, not the portfolio.
 [Sources]
-  · baseline_closure_v1_canonical.json → /scenarios/closure_m13/RBF/duration_mean, /incomplete_recovery_rate
+  · baseline_closure_v2_canonical.json → /scenarios/closure_m13/RBF/duration_mean, /incomplete_recovery_rate
   · Conditioning on a non-random subsample is a specification error: L-36 Heckman (1979)
   · Conditioning on a common effect: L-37 Hernán, Hernández-Díaz &amp; Robins (2004)
   · Right-censoring machinery: L-32 Kaplan &amp; Meier (1958), L-33 Klein &amp; Moeschberger (2003)
@@ -2111,7 +2111,7 @@
               <a:rPr lang="en-US" dirty="0"/>
               <a:t>Two distinct ideas, do not merge them. Pairing = every arm sees the same generated path. Cost-matching = only RBF and FIX-A share principal, total and term. FIX-B is an outside price reference and is not matched to anything; its 18% is an assumption of ours.
 [Sources]
-  · Matched terms: baseline_v2_canonical.json and baseline_equalcost_v1_canonical.json → /match_benchmark_a
+  · Matched terms: baseline_v3_canonical.json and baseline_equalcost_v2_canonical.json → /match_benchmark_a
   · FIX-B’s 18% nominal is an assumed input, not a market rate — spec amendment A-8
   · Factor rate and APR are not commensurable without conversion: L-23 (NY 23 NYCRR 600), L-24 (California)</a:t>
             </a:r>
@@ -2203,7 +2203,7 @@
               <a:rPr lang="en-US" dirty="0"/>
               <a:t>Never show the left chart without the right one. That pairing is the paper's central discipline. The pairing rule is general; this scenario's direction is not.
 [Sources]
-  · S-1 | baseline_v2_canonical.json → /scenarios/severe_downturn
+  · S-1 | baseline_v3_canonical.json → /scenarios/severe_downturn
   · Burden must be read across the distribution, not at the mean: L-13 Chapman et al. (2010)
   · Fixed schedules concentrate burden in low-income states: L-12 Chapman &amp; Lounkaew (2015)
   · 15% band is illustrative, chosen for this study — ledger Q-4, not a validated hardship cutoff</a:t>
@@ -2296,7 +2296,7 @@
               <a:rPr lang="en-US" dirty="0"/>
               <a:t>This is the contribution. Both halves of the last line matter — separable is not the same as outcome-independent.
 [Sources]
-  · P-1, P-2 | validation_v1_canonical.json → /pricing/equal_cost, /pricing/benchmark_b_apr
+  · P-1, P-2 | validation_v2_canonical.json → /pricing/equal_cost, /pricing/benchmark_b_apr
   · Separability of price and payment rule: DERIVATIONS.md P6(a), P6(b)
   · Contingency can carry a premium in other domains — L-18 (human capital), L-19 (sovereign). Neither is SME finance; no general rule is claimed</a:t>
             </a:r>
@@ -2482,8 +2482,8 @@
               <a:rPr lang="en-US" dirty="0"/>
               <a:t>Note the price effect: closure_m13 falls from 76.2% to 7.6% on the cap factor alone. Same structure, nearer threshold.
 [Sources]
-  · S-3 | baseline_closure_v1_canonical.json → /scenarios/*/RBF/incomplete_recovery_rate
-  · S-4 | baseline_closure_equalcost_v1_canonical.json → same paths
+  · S-3 | baseline_closure_v2_canonical.json → /scenarios/*/RBF/incomplete_recovery_rate
+  · S-4 | baseline_closure_equalcost_v2_canonical.json → same paths
   · Why a nearer cap completes sooner: DERIVATIONS.md P6(a), P7</a:t>
             </a:r>
             <a:endParaRPr lang="en-US" dirty="0"/>
@@ -3343,7 +3343,7 @@
                 <a:ea typeface="Calibri" pitchFamily="34" charset="-122"/>
                 <a:cs typeface="Calibri" pitchFamily="34" charset="-120"/>
               </a:rPr>
-              <a:t>Mean duration and mean effective APR are computed only over paths that reached the target. They estimate E[T | completion occurs by horizon H] — not E[T].</a:t>
+              <a:t>Mean duration is computed only over paths that reached the target — it estimates E[T | completion by horizon H], not E[T]. Mean APR is computed over paths with a DEFINED RATE, a different and larger set: in closure_m13 at f = 1.20, 119 of 500 completed while all 500 had a rate.</a:t>
             </a:r>
             <a:endParaRPr lang="en-US" sz="1500" dirty="0"/>
           </a:p>
@@ -3529,7 +3529,7 @@
                 <a:ea typeface="Calibri" pitchFamily="34" charset="-122"/>
                 <a:cs typeface="Calibri" pitchFamily="34" charset="-120"/>
               </a:rPr>
-              <a:t>baseline_closure_v1_canonical.json → /scenarios/closure_m13/RBF</a:t>
+              <a:t>baseline_closure_v2_canonical.json → /scenarios/closure_m13/RBF</a:t>
             </a:r>
             <a:endParaRPr lang="en-US" sz="900" dirty="0"/>
           </a:p>
@@ -4308,7 +4308,7 @@
                 <a:ea typeface="Cambria" pitchFamily="34" charset="-122"/>
                 <a:cs typeface="Cambria" pitchFamily="34" charset="-120"/>
               </a:rPr>
-              <a:t>1,030</a:t>
+              <a:t>1,042</a:t>
             </a:r>
             <a:endParaRPr lang="en-US" sz="3400" dirty="0"/>
           </a:p>
@@ -4370,7 +4370,7 @@
                 <a:ea typeface="Calibri" pitchFamily="34" charset="-122"/>
                 <a:cs typeface="Calibri" pitchFamily="34" charset="-120"/>
               </a:rPr>
-              <a:t>401 backend, 629 simulation</a:t>
+              <a:t>403 backend, 639 simulation</a:t>
             </a:r>
             <a:endParaRPr lang="en-US" sz="1200" dirty="0"/>
           </a:p>
@@ -4551,28 +4551,27 @@
         </p:nvSpPr>
         <p:spPr>
           <a:xfrm>
-            <a:off x="640080" y="3977640"/>
-            <a:ext cx="10881360" cy="1737360"/>
-          </a:xfrm>
-          <a:prstGeom prst="rect">
-            <a:avLst/>
-          </a:prstGeom>
-          <a:noFill/>
-          <a:ln/>
-        </p:spPr>
-        <p:txBody>
-          <a:bodyPr wrap="square" lIns="0" tIns="0" rIns="0" bIns="0" rtlCol="0" anchor="ctr"/>
-          <a:lstStyle/>
-          <a:p>
-            <a:pPr marL="342900" indent="-342900">
-              <a:spcAft>
-                <a:spcPts val="800"/>
-              </a:spcAft>
-              <a:buSzPct val="100000"/>
-              <a:buChar char="•"/>
-            </a:pPr>
-            <a:r>
-              <a:rPr lang="en-US" sz="1300" dirty="0">
+            <a:off x="640080" y="3931920"/>
+            <a:ext cx="10881360" cy="530352"/>
+          </a:xfrm>
+          <a:prstGeom prst="rect">
+            <a:avLst/>
+          </a:prstGeom>
+          <a:noFill/>
+          <a:ln/>
+        </p:spPr>
+        <p:txBody>
+          <a:bodyPr wrap="square" lIns="0" tIns="0" rIns="0" bIns="0" rtlCol="0" anchor="ctr"/>
+          <a:lstStyle/>
+          <a:p>
+            <a:pPr indent="0" marL="0">
+              <a:lnSpc>
+                <a:spcPts val="1600"/>
+              </a:lnSpc>
+              <a:buNone/>
+            </a:pPr>
+            <a:r>
+              <a:rPr lang="en-US" sz="1250" dirty="0">
                 <a:solidFill>
                   <a:srgbClr val="333333"/>
                 </a:solidFill>
@@ -4580,20 +4579,41 @@
                 <a:ea typeface="Calibri" pitchFamily="34" charset="-122"/>
                 <a:cs typeface="Calibri" pitchFamily="34" charset="-120"/>
               </a:rPr>
-              <a:t>All five artifacts reproduce numerically at published precision on every platform tested.</a:t>
-            </a:r>
-            <a:endParaRPr lang="en-US" sz="1300" dirty="0"/>
-          </a:p>
-          <a:p>
-            <a:pPr marL="342900" indent="-342900">
-              <a:spcAft>
-                <a:spcPts val="800"/>
-              </a:spcAft>
-              <a:buSzPct val="100000"/>
-              <a:buChar char="•"/>
-            </a:pPr>
-            <a:r>
-              <a:rPr lang="en-US" sz="1300" dirty="0">
+              <a:t>•   All five artifacts reproduce numerically at published precision on every platform tested.</a:t>
+            </a:r>
+            <a:endParaRPr lang="en-US" sz="1250" dirty="0"/>
+          </a:p>
+        </p:txBody>
+      </p:sp>
+      <p:sp>
+        <p:nvSpPr>
+          <p:cNvPr id="14" name="Text 12"/>
+          <p:cNvSpPr/>
+          <p:nvPr/>
+        </p:nvSpPr>
+        <p:spPr>
+          <a:xfrm>
+            <a:off x="640080" y="4462272"/>
+            <a:ext cx="10881360" cy="530352"/>
+          </a:xfrm>
+          <a:prstGeom prst="rect">
+            <a:avLst/>
+          </a:prstGeom>
+          <a:noFill/>
+          <a:ln/>
+        </p:spPr>
+        <p:txBody>
+          <a:bodyPr wrap="square" lIns="0" tIns="0" rIns="0" bIns="0" rtlCol="0" anchor="ctr"/>
+          <a:lstStyle/>
+          <a:p>
+            <a:pPr indent="0" marL="0">
+              <a:lnSpc>
+                <a:spcPts val="1600"/>
+              </a:lnSpc>
+              <a:buNone/>
+            </a:pPr>
+            <a:r>
+              <a:rPr lang="en-US" sz="1250" dirty="0">
                 <a:solidFill>
                   <a:srgbClr val="333333"/>
                 </a:solidFill>
@@ -4601,20 +4621,41 @@
                 <a:ea typeface="Calibri" pitchFamily="34" charset="-122"/>
                 <a:cs typeface="Calibri" pitchFamily="34" charset="-120"/>
               </a:rPr>
-              <a:t>Byte equality holds within a fixed runtime, not across platforms — 3 of 5 byte-identical on macOS CPython 3.11.5, 5 of 5 on Linux 3.10.12.</a:t>
-            </a:r>
-            <a:endParaRPr lang="en-US" sz="1300" dirty="0"/>
-          </a:p>
-          <a:p>
-            <a:pPr marL="342900" indent="-342900">
-              <a:spcAft>
-                <a:spcPts val="800"/>
-              </a:spcAft>
-              <a:buSzPct val="100000"/>
-              <a:buChar char="•"/>
-            </a:pPr>
-            <a:r>
-              <a:rPr lang="en-US" sz="1300" dirty="0">
+              <a:t>•   Byte equality holds within a fixed runtime, not across platforms — 3 of 5 byte-identical on macOS CPython 3.11.5, 5 of 5 on Linux 3.10.12.</a:t>
+            </a:r>
+            <a:endParaRPr lang="en-US" sz="1250" dirty="0"/>
+          </a:p>
+        </p:txBody>
+      </p:sp>
+      <p:sp>
+        <p:nvSpPr>
+          <p:cNvPr id="15" name="Text 13"/>
+          <p:cNvSpPr/>
+          <p:nvPr/>
+        </p:nvSpPr>
+        <p:spPr>
+          <a:xfrm>
+            <a:off x="640080" y="4992624"/>
+            <a:ext cx="10881360" cy="530352"/>
+          </a:xfrm>
+          <a:prstGeom prst="rect">
+            <a:avLst/>
+          </a:prstGeom>
+          <a:noFill/>
+          <a:ln/>
+        </p:spPr>
+        <p:txBody>
+          <a:bodyPr wrap="square" lIns="0" tIns="0" rIns="0" bIns="0" rtlCol="0" anchor="ctr"/>
+          <a:lstStyle/>
+          <a:p>
+            <a:pPr indent="0" marL="0">
+              <a:lnSpc>
+                <a:spcPts val="1600"/>
+              </a:lnSpc>
+              <a:buNone/>
+            </a:pPr>
+            <a:r>
+              <a:rPr lang="en-US" sz="1250" dirty="0">
                 <a:solidFill>
                   <a:srgbClr val="333333"/>
                 </a:solidFill>
@@ -4622,15 +4663,15 @@
                 <a:ea typeface="Calibri" pitchFamily="34" charset="-122"/>
                 <a:cs typeface="Calibri" pitchFamily="34" charset="-120"/>
               </a:rPr>
-              <a:t>An earlier claim of unqualified byte-for-byte reproducibility rested on a step that re-hashed the committed file rather than regenerating it. Both the claim and the evidence were corrected.</a:t>
-            </a:r>
-            <a:endParaRPr lang="en-US" sz="1300" dirty="0"/>
-          </a:p>
-        </p:txBody>
-      </p:sp>
-      <p:sp>
-        <p:nvSpPr>
-          <p:cNvPr id="14" name="Text 12"/>
+              <a:t>•   An earlier claim of unqualified byte-for-byte reproducibility rested on a step that re-hashed the committed file rather than regenerating it. Both the claim and the evidence were corrected.</a:t>
+            </a:r>
+            <a:endParaRPr lang="en-US" sz="1250" dirty="0"/>
+          </a:p>
+        </p:txBody>
+      </p:sp>
+      <p:sp>
+        <p:nvSpPr>
+          <p:cNvPr id="16" name="Text 14"/>
           <p:cNvSpPr/>
           <p:nvPr/>
         </p:nvSpPr>
@@ -4664,7 +4705,7 @@
                 <a:ea typeface="Calibri" pitchFamily="34" charset="-122"/>
                 <a:cs typeface="Calibri" pitchFamily="34" charset="-120"/>
               </a:rPr>
-              <a:t>Scope: simulation results are artifact-backed. Analytical results are derivation-backed and external facts are literature-backed; neither is covered by the checksum table. The 1,030 figure is non-browser: 401 backend and 629 simulation. Nine browser checks are defined and excluded from it; they passed in the earlier browser-capable run recorded at D-036, and skip where Playwright or Chromium is absent.</a:t>
+              <a:t>Scope: simulation results are artifact-backed. Analytical results are derivation-backed and external facts are literature-backed; neither is covered by the checksum table. The 1,042 figure is non-browser: 403 backend and 639 simulation. Nine browser checks are defined and excluded from it; they passed in the earlier browser-capable run recorded at D-036, and skip where Playwright or Chromium is absent.</a:t>
             </a:r>
             <a:endParaRPr lang="en-US" sz="1100" dirty="0"/>
           </a:p>
@@ -6383,7 +6424,7 @@
                 <a:ea typeface="Calibri" pitchFamily="34" charset="-122"/>
                 <a:cs typeface="Calibri" pitchFamily="34" charset="-120"/>
               </a:rPr>
-              <a:t>baseline_v2_canonical.json and baseline_equalcost_v1_canonical.json → /match_benchmark_a</a:t>
+              <a:t>baseline_v3_canonical.json and baseline_equalcost_v2_canonical.json → /match_benchmark_a</a:t>
             </a:r>
             <a:endParaRPr lang="en-US" sz="900" dirty="0"/>
           </a:p>
@@ -6606,7 +6647,7 @@
                 <a:ea typeface="Calibri" pitchFamily="34" charset="-122"/>
                 <a:cs typeface="Calibri" pitchFamily="34" charset="-120"/>
               </a:rPr>
-              <a:t>baseline_v2_canonical.json → /scenarios/severe_downturn   ·   claim-ledger S-1, I-3</a:t>
+              <a:t>baseline_v3_canonical.json → /scenarios/severe_downturn   ·   claim-ledger S-1, I-3</a:t>
             </a:r>
             <a:endParaRPr lang="en-US" sz="900" dirty="0"/>
           </a:p>
@@ -7148,7 +7189,7 @@
                 <a:ea typeface="Calibri" pitchFamily="34" charset="-122"/>
                 <a:cs typeface="Calibri" pitchFamily="34" charset="-120"/>
               </a:rPr>
-              <a:t>validation_v1_canonical.json → /pricing   ·   claim-ledger P-1, P-2</a:t>
+              <a:t>validation_v2_canonical.json → /pricing   ·   claim-ledger P-1, P-2</a:t>
             </a:r>
             <a:endParaRPr lang="en-US" sz="900" dirty="0"/>
           </a:p>
@@ -7338,28 +7379,27 @@
         </p:nvSpPr>
         <p:spPr>
           <a:xfrm>
-            <a:off x="640080" y="3246120"/>
-            <a:ext cx="10698480" cy="1737360"/>
-          </a:xfrm>
-          <a:prstGeom prst="rect">
-            <a:avLst/>
-          </a:prstGeom>
-          <a:noFill/>
-          <a:ln/>
-        </p:spPr>
-        <p:txBody>
-          <a:bodyPr wrap="square" lIns="0" tIns="0" rIns="0" bIns="0" rtlCol="0" anchor="ctr"/>
-          <a:lstStyle/>
-          <a:p>
-            <a:pPr marL="342900" indent="-342900">
-              <a:spcAft>
-                <a:spcPts val="1000"/>
-              </a:spcAft>
-              <a:buSzPct val="100000"/>
-              <a:buChar char="•"/>
-            </a:pPr>
-            <a:r>
-              <a:rPr lang="en-US" sz="1500" dirty="0">
+            <a:off x="640080" y="3200400"/>
+            <a:ext cx="10698480" cy="566928"/>
+          </a:xfrm>
+          <a:prstGeom prst="rect">
+            <a:avLst/>
+          </a:prstGeom>
+          <a:noFill/>
+          <a:ln/>
+        </p:spPr>
+        <p:txBody>
+          <a:bodyPr wrap="square" lIns="0" tIns="0" rIns="0" bIns="0" rtlCol="0" anchor="ctr"/>
+          <a:lstStyle/>
+          <a:p>
+            <a:pPr indent="0" marL="0">
+              <a:lnSpc>
+                <a:spcPts val="1900"/>
+              </a:lnSpc>
+              <a:buNone/>
+            </a:pPr>
+            <a:r>
+              <a:rPr lang="en-US" sz="1450" dirty="0">
                 <a:solidFill>
                   <a:srgbClr val="333333"/>
                 </a:solidFill>
@@ -7367,20 +7407,41 @@
                 <a:ea typeface="Calibri" pitchFamily="34" charset="-122"/>
                 <a:cs typeface="Calibri" pitchFamily="34" charset="-120"/>
               </a:rPr>
-              <a:t>It fixed f = 1.20 as though it were intrinsic. The contractual repayment target A × f is proportional to f — and realised repayment equals that target only when the contract completes.</a:t>
-            </a:r>
-            <a:endParaRPr lang="en-US" sz="1500" dirty="0"/>
-          </a:p>
-          <a:p>
-            <a:pPr marL="342900" indent="-342900">
-              <a:spcAft>
-                <a:spcPts val="1000"/>
-              </a:spcAft>
-              <a:buSzPct val="100000"/>
-              <a:buChar char="•"/>
-            </a:pPr>
-            <a:r>
-              <a:rPr lang="en-US" sz="1500" dirty="0">
+              <a:t>•   It fixed f = 1.20 as though it were intrinsic. The contractual repayment target A × f is proportional to f — and realised repayment equals that target only when the contract completes.</a:t>
+            </a:r>
+            <a:endParaRPr lang="en-US" sz="1450" dirty="0"/>
+          </a:p>
+        </p:txBody>
+      </p:sp>
+      <p:sp>
+        <p:nvSpPr>
+          <p:cNvPr id="7" name="Text 5"/>
+          <p:cNvSpPr/>
+          <p:nvPr/>
+        </p:nvSpPr>
+        <p:spPr>
+          <a:xfrm>
+            <a:off x="640080" y="3767328"/>
+            <a:ext cx="10698480" cy="566928"/>
+          </a:xfrm>
+          <a:prstGeom prst="rect">
+            <a:avLst/>
+          </a:prstGeom>
+          <a:noFill/>
+          <a:ln/>
+        </p:spPr>
+        <p:txBody>
+          <a:bodyPr wrap="square" lIns="0" tIns="0" rIns="0" bIns="0" rtlCol="0" anchor="ctr"/>
+          <a:lstStyle/>
+          <a:p>
+            <a:pPr indent="0" marL="0">
+              <a:lnSpc>
+                <a:spcPts val="1900"/>
+              </a:lnSpc>
+              <a:buNone/>
+            </a:pPr>
+            <a:r>
+              <a:rPr lang="en-US" sz="1450" dirty="0">
                 <a:solidFill>
                   <a:srgbClr val="333333"/>
                 </a:solidFill>
@@ -7388,20 +7449,41 @@
                 <a:ea typeface="Calibri" pitchFamily="34" charset="-122"/>
                 <a:cs typeface="Calibri" pitchFamily="34" charset="-120"/>
               </a:rPr>
-              <a:t>It quoted one effective APR as though it were a contract property — APR is jointly determined by the price and the revenue path.</a:t>
-            </a:r>
-            <a:endParaRPr lang="en-US" sz="1500" dirty="0"/>
-          </a:p>
-          <a:p>
-            <a:pPr marL="342900" indent="-342900">
-              <a:spcAft>
-                <a:spcPts val="1000"/>
-              </a:spcAft>
-              <a:buSzPct val="100000"/>
-              <a:buChar char="•"/>
-            </a:pPr>
-            <a:r>
-              <a:rPr lang="en-US" sz="1500" dirty="0">
+              <a:t>•   It quoted one effective APR as though it were a contract property — among rate-defined paths the APR is jointly determined by the price and the revenue path.</a:t>
+            </a:r>
+            <a:endParaRPr lang="en-US" sz="1450" dirty="0"/>
+          </a:p>
+        </p:txBody>
+      </p:sp>
+      <p:sp>
+        <p:nvSpPr>
+          <p:cNvPr id="8" name="Text 6"/>
+          <p:cNvSpPr/>
+          <p:nvPr/>
+        </p:nvSpPr>
+        <p:spPr>
+          <a:xfrm>
+            <a:off x="640080" y="4334256"/>
+            <a:ext cx="10698480" cy="566928"/>
+          </a:xfrm>
+          <a:prstGeom prst="rect">
+            <a:avLst/>
+          </a:prstGeom>
+          <a:noFill/>
+          <a:ln/>
+        </p:spPr>
+        <p:txBody>
+          <a:bodyPr wrap="square" lIns="0" tIns="0" rIns="0" bIns="0" rtlCol="0" anchor="ctr"/>
+          <a:lstStyle/>
+          <a:p>
+            <a:pPr indent="0" marL="0">
+              <a:lnSpc>
+                <a:spcPts val="1900"/>
+              </a:lnSpc>
+              <a:buNone/>
+            </a:pPr>
+            <a:r>
+              <a:rPr lang="en-US" sz="1450" dirty="0">
                 <a:solidFill>
                   <a:srgbClr val="333333"/>
                 </a:solidFill>
@@ -7409,15 +7491,15 @@
                 <a:ea typeface="Calibri" pitchFamily="34" charset="-122"/>
                 <a:cs typeface="Calibri" pitchFamily="34" charset="-120"/>
               </a:rPr>
-              <a:t>It survived several earlier drafts of this project, written while actively trying to avoid exactly this error.</a:t>
-            </a:r>
-            <a:endParaRPr lang="en-US" sz="1500" dirty="0"/>
-          </a:p>
-        </p:txBody>
-      </p:sp>
-      <p:sp>
-        <p:nvSpPr>
-          <p:cNvPr id="7" name="Text 5"/>
+              <a:t>•   It survived several earlier drafts of this project, written while actively trying to avoid exactly this error.</a:t>
+            </a:r>
+            <a:endParaRPr lang="en-US" sz="1450" dirty="0"/>
+          </a:p>
+        </p:txBody>
+      </p:sp>
+      <p:sp>
+        <p:nvSpPr>
+          <p:cNvPr id="9" name="Text 7"/>
           <p:cNvSpPr/>
           <p:nvPr/>
         </p:nvSpPr>

--- a/research/publication/RBF_DECK.pptx
+++ b/research/publication/RBF_DECK.pptx
@@ -4308,7 +4308,7 @@
                 <a:ea typeface="Cambria" pitchFamily="34" charset="-122"/>
                 <a:cs typeface="Cambria" pitchFamily="34" charset="-120"/>
               </a:rPr>
-              <a:t>1,042</a:t>
+              <a:t>1,080</a:t>
             </a:r>
             <a:endParaRPr lang="en-US" sz="3400" dirty="0"/>
           </a:p>
@@ -4370,7 +4370,7 @@
                 <a:ea typeface="Calibri" pitchFamily="34" charset="-122"/>
                 <a:cs typeface="Calibri" pitchFamily="34" charset="-120"/>
               </a:rPr>
-              <a:t>403 backend, 639 simulation</a:t>
+              <a:t>437 backend, 643 simulation</a:t>
             </a:r>
             <a:endParaRPr lang="en-US" sz="1200" dirty="0"/>
           </a:p>
@@ -4705,7 +4705,7 @@
                 <a:ea typeface="Calibri" pitchFamily="34" charset="-122"/>
                 <a:cs typeface="Calibri" pitchFamily="34" charset="-120"/>
               </a:rPr>
-              <a:t>Scope: simulation results are artifact-backed. Analytical results are derivation-backed and external facts are literature-backed; neither is covered by the checksum table. The 1,042 figure is non-browser: 403 backend and 639 simulation. Nine browser checks are defined and excluded from it; they passed in the earlier browser-capable run recorded at D-036, and skip where Playwright or Chromium is absent.</a:t>
+              <a:t>Scope: simulation results are artifact-backed. Analytical results are derivation-backed and external facts are literature-backed; neither is covered by the checksum table. The 1,080 figure is non-browser: 437 backend and 643 simulation. Nine browser checks are defined and excluded from it; they passed in the earlier browser-capable run recorded at D-036, and skip where Playwright or Chromium is absent.</a:t>
             </a:r>
             <a:endParaRPr lang="en-US" sz="1100" dirty="0"/>
           </a:p>
@@ -7718,7 +7718,7 @@
                 <a:ea typeface="Calibri" pitchFamily="34" charset="-122"/>
                 <a:cs typeface="Calibri" pitchFamily="34" charset="-120"/>
               </a:rPr>
-              <a:t>baseline_closure_v1 and baseline_closure_equalcost_v1 → /scenarios/*/RBF   ·   claim-ledger S-3, S-4</a:t>
+              <a:t>baseline_closure_v2 and baseline_closure_equalcost_v2 → /scenarios/*/RBF   ·   claim-ledger S-3, S-4</a:t>
             </a:r>
             <a:endParaRPr lang="en-US" sz="900" dirty="0"/>
           </a:p>

--- a/research/publication/RBF_DECK.pptx
+++ b/research/publication/RBF_DECK.pptx
@@ -4308,7 +4308,7 @@
                 <a:ea typeface="Cambria" pitchFamily="34" charset="-122"/>
                 <a:cs typeface="Cambria" pitchFamily="34" charset="-120"/>
               </a:rPr>
-              <a:t>1,080</a:t>
+              <a:t>1,123</a:t>
             </a:r>
             <a:endParaRPr lang="en-US" sz="3400" dirty="0"/>
           </a:p>
@@ -4370,7 +4370,7 @@
                 <a:ea typeface="Calibri" pitchFamily="34" charset="-122"/>
                 <a:cs typeface="Calibri" pitchFamily="34" charset="-120"/>
               </a:rPr>
-              <a:t>437 backend, 643 simulation</a:t>
+              <a:t>480 backend, 643 simulation</a:t>
             </a:r>
             <a:endParaRPr lang="en-US" sz="1200" dirty="0"/>
           </a:p>
@@ -4705,7 +4705,7 @@
                 <a:ea typeface="Calibri" pitchFamily="34" charset="-122"/>
                 <a:cs typeface="Calibri" pitchFamily="34" charset="-120"/>
               </a:rPr>
-              <a:t>Scope: simulation results are artifact-backed. Analytical results are derivation-backed and external facts are literature-backed; neither is covered by the checksum table. The 1,080 figure is non-browser: 437 backend and 643 simulation. Nine browser checks are defined and excluded from it; they passed in the earlier browser-capable run recorded at D-036, and skip where Playwright or Chromium is absent.</a:t>
+              <a:t>Scope: simulation results are artifact-backed. Analytical results are derivation-backed and external facts are literature-backed; neither is covered by the checksum table. The 1,123 figure is non-browser: 480 backend and 643 simulation. Nine browser checks are defined and excluded from it; they passed in the earlier browser-capable run recorded at D-036, and skip where Playwright or Chromium is absent.</a:t>
             </a:r>
             <a:endParaRPr lang="en-US" sz="1100" dirty="0"/>
           </a:p>

--- a/research/publication/RBF_DECK.pptx
+++ b/research/publication/RBF_DECK.pptx
@@ -4308,7 +4308,7 @@
                 <a:ea typeface="Cambria" pitchFamily="34" charset="-122"/>
                 <a:cs typeface="Cambria" pitchFamily="34" charset="-120"/>
               </a:rPr>
-              <a:t>1,123</a:t>
+              <a:t>1,138</a:t>
             </a:r>
             <a:endParaRPr lang="en-US" sz="3400" dirty="0"/>
           </a:p>
@@ -4370,7 +4370,7 @@
                 <a:ea typeface="Calibri" pitchFamily="34" charset="-122"/>
                 <a:cs typeface="Calibri" pitchFamily="34" charset="-120"/>
               </a:rPr>
-              <a:t>480 backend, 643 simulation</a:t>
+              <a:t>495 backend, 643 simulation</a:t>
             </a:r>
             <a:endParaRPr lang="en-US" sz="1200" dirty="0"/>
           </a:p>
@@ -4621,7 +4621,7 @@
                 <a:ea typeface="Calibri" pitchFamily="34" charset="-122"/>
                 <a:cs typeface="Calibri" pitchFamily="34" charset="-120"/>
               </a:rPr>
-              <a:t>•   Byte equality holds within a fixed runtime, not across platforms — 3 of 5 byte-identical on macOS CPython 3.11.5, 5 of 5 on Linux 3.10.12.</a:t>
+              <a:t>•   Byte equality holds within a fixed runtime, not across platforms — 5 of 5 byte-identical on Linux 3.10.12, and 3 of 5 on macOS 26.0 arm64 / CPython 3.11.5, measured on these artifacts by an independent audit run.</a:t>
             </a:r>
             <a:endParaRPr lang="en-US" sz="1250" dirty="0"/>
           </a:p>
@@ -4705,7 +4705,7 @@
                 <a:ea typeface="Calibri" pitchFamily="34" charset="-122"/>
                 <a:cs typeface="Calibri" pitchFamily="34" charset="-120"/>
               </a:rPr>
-              <a:t>Scope: simulation results are artifact-backed. Analytical results are derivation-backed and external facts are literature-backed; neither is covered by the checksum table. The 1,123 figure is non-browser: 480 backend and 643 simulation. Nine browser checks are defined and excluded from it; they passed in the earlier browser-capable run recorded at D-036, and skip where Playwright or Chromium is absent.</a:t>
+              <a:t>Scope: simulation results are artifact-backed. Analytical results are derivation-backed and external facts are literature-backed; neither is covered by the checksum table. The 1,138 figure is non-browser: 495 backend and 643 simulation. Nine browser checks are defined and excluded from it. They were rewritten in this pass and have NOT executed since — Chromium is unavailable here, so they skip, and a skip is not a pass. Browser execution is an open external gate.</a:t>
             </a:r>
             <a:endParaRPr lang="en-US" sz="1100" dirty="0"/>
           </a:p>

--- a/research/publication/RBF_DECK.pptx
+++ b/research/publication/RBF_DECK.pptx
@@ -4308,7 +4308,7 @@
                 <a:ea typeface="Cambria" pitchFamily="34" charset="-122"/>
                 <a:cs typeface="Cambria" pitchFamily="34" charset="-120"/>
               </a:rPr>
-              <a:t>1,138</a:t>
+              <a:t>1,145</a:t>
             </a:r>
             <a:endParaRPr lang="en-US" sz="3400" dirty="0"/>
           </a:p>
@@ -4370,7 +4370,7 @@
                 <a:ea typeface="Calibri" pitchFamily="34" charset="-122"/>
                 <a:cs typeface="Calibri" pitchFamily="34" charset="-120"/>
               </a:rPr>
-              <a:t>495 backend, 643 simulation</a:t>
+              <a:t>502 backend, 643 simulation</a:t>
             </a:r>
             <a:endParaRPr lang="en-US" sz="1200" dirty="0"/>
           </a:p>
@@ -4705,7 +4705,7 @@
                 <a:ea typeface="Calibri" pitchFamily="34" charset="-122"/>
                 <a:cs typeface="Calibri" pitchFamily="34" charset="-120"/>
               </a:rPr>
-              <a:t>Scope: simulation results are artifact-backed. Analytical results are derivation-backed and external facts are literature-backed; neither is covered by the checksum table. The 1,138 figure is non-browser: 495 backend and 643 simulation. Nine browser checks are defined and excluded from it. They were rewritten in this pass and have NOT executed since — Chromium is unavailable here, so they skip, and a skip is not a pass. Browser execution is an open external gate.</a:t>
+              <a:t>Scope: simulation results are artifact-backed. Analytical results are derivation-backed and external facts are literature-backed; neither is covered by the checksum table. The 1,145 figure is non-browser: 502 backend and 643 simulation. Nine browser checks are defined and excluded from it. They executed and passed 9/9 in an independent run on macOS 26.0 arm64 / Playwright Chromium at commit dcbfc3b; every input they exercise is byte-identical at HEAD. Where Chromium is absent they skip, and a skip is never counted as a pass.</a:t>
             </a:r>
             <a:endParaRPr lang="en-US" sz="1100" dirty="0"/>
           </a:p>

--- a/research/publication/RBF_DECK.pptx
+++ b/research/publication/RBF_DECK.pptx
@@ -4705,7 +4705,7 @@
                 <a:ea typeface="Calibri" pitchFamily="34" charset="-122"/>
                 <a:cs typeface="Calibri" pitchFamily="34" charset="-120"/>
               </a:rPr>
-              <a:t>Scope: simulation results are artifact-backed. Analytical results are derivation-backed and external facts are literature-backed; neither is covered by the checksum table. The 1,145 figure is non-browser: 502 backend and 643 simulation. Nine browser checks are defined and excluded from it. They executed and passed 9/9 in an independent run on macOS 26.0 arm64 / Playwright Chromium at commit dcbfc3b; every input they exercise is byte-identical at HEAD. Where Chromium is absent they skip, and a skip is never counted as a pass.</a:t>
+              <a:t>Scope: simulation results are artifact-backed. Analytical results are derivation-backed and external facts are literature-backed; neither is covered by the checksum table. The 1,145 figure is non-browser: 502 backend and 643 simulation. The nine Playwright browser checks are excluded from that total. They executed and passed 9/9 in 23.55 seconds on macOS 26.0 arm64, Python 3.11.5 and Playwright 1.62.0 with Chromium, against a local server at commit c8261c6. When Chromium is unavailable, the checks skip; a skip is never counted as a pass.</a:t>
             </a:r>
             <a:endParaRPr lang="en-US" sz="1100" dirty="0"/>
           </a:p>

--- a/research/publication/RBF_DECK.pptx
+++ b/research/publication/RBF_DECK.pptx
@@ -4308,7 +4308,7 @@
                 <a:ea typeface="Cambria" pitchFamily="34" charset="-122"/>
                 <a:cs typeface="Cambria" pitchFamily="34" charset="-120"/>
               </a:rPr>
-              <a:t>1,145</a:t>
+              <a:t>1,153</a:t>
             </a:r>
             <a:endParaRPr lang="en-US" sz="3400" dirty="0"/>
           </a:p>
@@ -4370,7 +4370,7 @@
                 <a:ea typeface="Calibri" pitchFamily="34" charset="-122"/>
                 <a:cs typeface="Calibri" pitchFamily="34" charset="-120"/>
               </a:rPr>
-              <a:t>502 backend, 643 simulation</a:t>
+              <a:t>502 backend, 651 simulation</a:t>
             </a:r>
             <a:endParaRPr lang="en-US" sz="1200" dirty="0"/>
           </a:p>
@@ -4705,7 +4705,7 @@
                 <a:ea typeface="Calibri" pitchFamily="34" charset="-122"/>
                 <a:cs typeface="Calibri" pitchFamily="34" charset="-120"/>
               </a:rPr>
-              <a:t>Scope: simulation results are artifact-backed. Analytical results are derivation-backed and external facts are literature-backed; neither is covered by the checksum table. The 1,145 figure is non-browser: 502 backend and 643 simulation. The nine Playwright browser checks are excluded from that total. They executed and passed 9/9 in 23.55 seconds on macOS 26.0 arm64, Python 3.11.5 and Playwright 1.62.0 with Chromium, against a local server at commit c8261c6. When Chromium is unavailable, the checks skip; a skip is never counted as a pass.</a:t>
+              <a:t>Scope: simulation results are artifact-backed. Analytical results are derivation-backed and external facts are literature-backed; neither is covered by the checksum table. The 1,153 figure is non-browser: 502 backend and 651 simulation. The nine Playwright browser checks are excluded from that total. They executed and passed 9/9 in 23.55 seconds on macOS 26.0 arm64, Python 3.11.5 and Playwright 1.62.0 with Chromium, against a local server at commit c8261c6. When Chromium is unavailable, the checks skip; a skip is never counted as a pass.</a:t>
             </a:r>
             <a:endParaRPr lang="en-US" sz="1100" dirty="0"/>
           </a:p>

--- a/research/publication/RBF_DECK.pptx
+++ b/research/publication/RBF_DECK.pptx
@@ -4308,7 +4308,7 @@
                 <a:ea typeface="Cambria" pitchFamily="34" charset="-122"/>
                 <a:cs typeface="Cambria" pitchFamily="34" charset="-120"/>
               </a:rPr>
-              <a:t>1,153</a:t>
+              <a:t>1,156</a:t>
             </a:r>
             <a:endParaRPr lang="en-US" sz="3400" dirty="0"/>
           </a:p>
@@ -4370,7 +4370,7 @@
                 <a:ea typeface="Calibri" pitchFamily="34" charset="-122"/>
                 <a:cs typeface="Calibri" pitchFamily="34" charset="-120"/>
               </a:rPr>
-              <a:t>502 backend, 651 simulation</a:t>
+              <a:t>505 backend, 651 simulation</a:t>
             </a:r>
             <a:endParaRPr lang="en-US" sz="1200" dirty="0"/>
           </a:p>
@@ -4705,7 +4705,7 @@
                 <a:ea typeface="Calibri" pitchFamily="34" charset="-122"/>
                 <a:cs typeface="Calibri" pitchFamily="34" charset="-120"/>
               </a:rPr>
-              <a:t>Scope: simulation results are artifact-backed. Analytical results are derivation-backed and external facts are literature-backed; neither is covered by the checksum table. The 1,153 figure is non-browser: 502 backend and 651 simulation. The nine Playwright browser checks are excluded from that total. They executed and passed 9/9 in 23.55 seconds on macOS 26.0 arm64, Python 3.11.5 and Playwright 1.62.0 with Chromium, against a local server at commit c8261c6. When Chromium is unavailable, the checks skip; a skip is never counted as a pass.</a:t>
+              <a:t>Scope: simulation results are artifact-backed. Analytical results are derivation-backed and external facts are literature-backed; neither is covered by the checksum table. The 1,156 figure is non-browser: 505 backend and 651 simulation. The nine Playwright browser checks are excluded from that total. They executed and passed 9/9 in 23.55 seconds on macOS 26.0 arm64, Python 3.11.5 and Playwright 1.62.0 with Chromium, against a local server at commit c8261c6. When Chromium is unavailable, the checks skip; a skip is never counted as a pass.</a:t>
             </a:r>
             <a:endParaRPr lang="en-US" sz="1100" dirty="0"/>
           </a:p>
@@ -7012,7 +7012,7 @@
                 <a:ea typeface="Calibri" pitchFamily="34" charset="-122"/>
                 <a:cs typeface="Calibri" pitchFamily="34" charset="-120"/>
               </a:rPr>
-              <a:t>19.537656% against the reference's 19.561817% — residual ≈ 0.02416pp. Not an exact match: duration is integer-valued.</a:t>
+              <a:t>19.537656% against the reference's 19.561817% — residual ≈ 0.02416pp. That residual is a grid-resolution result: 1.0945 is the nearest point the 0.0005-step search visited. APR varies continuously with f within a fixed paying term; a numerical root sits at approximately 1.09462066267694.</a:t>
             </a:r>
             <a:endParaRPr lang="en-US" sz="1200" dirty="0"/>
           </a:p>
